--- a/4.2次元ベクトル/定着4_2次元ベクトル.pptx
+++ b/4.2次元ベクトル/定着4_2次元ベクトル.pptx
@@ -260,7 +260,7 @@
           <a:p>
             <a:fld id="{FA462F84-2469-44CB-803F-224FFA9B3173}" type="datetimeFigureOut">
               <a:rPr kumimoji="1" lang="ja-JP" altLang="en-US" smtClean="0"/>
-              <a:t>2025/10/30</a:t>
+              <a:t>2026/3/28</a:t>
             </a:fld>
             <a:endParaRPr kumimoji="1" lang="ja-JP" altLang="en-US"/>
           </a:p>
@@ -490,7 +490,7 @@
           <a:p>
             <a:fld id="{FA462F84-2469-44CB-803F-224FFA9B3173}" type="datetimeFigureOut">
               <a:rPr kumimoji="1" lang="ja-JP" altLang="en-US" smtClean="0"/>
-              <a:t>2025/10/30</a:t>
+              <a:t>2026/3/28</a:t>
             </a:fld>
             <a:endParaRPr kumimoji="1" lang="ja-JP" altLang="en-US"/>
           </a:p>
@@ -730,7 +730,7 @@
           <a:p>
             <a:fld id="{FA462F84-2469-44CB-803F-224FFA9B3173}" type="datetimeFigureOut">
               <a:rPr kumimoji="1" lang="ja-JP" altLang="en-US" smtClean="0"/>
-              <a:t>2025/10/30</a:t>
+              <a:t>2026/3/28</a:t>
             </a:fld>
             <a:endParaRPr kumimoji="1" lang="ja-JP" altLang="en-US"/>
           </a:p>
@@ -960,7 +960,7 @@
           <a:p>
             <a:fld id="{FA462F84-2469-44CB-803F-224FFA9B3173}" type="datetimeFigureOut">
               <a:rPr kumimoji="1" lang="ja-JP" altLang="en-US" smtClean="0"/>
-              <a:t>2025/10/30</a:t>
+              <a:t>2026/3/28</a:t>
             </a:fld>
             <a:endParaRPr kumimoji="1" lang="ja-JP" altLang="en-US"/>
           </a:p>
@@ -1235,7 +1235,7 @@
           <a:p>
             <a:fld id="{FA462F84-2469-44CB-803F-224FFA9B3173}" type="datetimeFigureOut">
               <a:rPr kumimoji="1" lang="ja-JP" altLang="en-US" smtClean="0"/>
-              <a:t>2025/10/30</a:t>
+              <a:t>2026/3/28</a:t>
             </a:fld>
             <a:endParaRPr kumimoji="1" lang="ja-JP" altLang="en-US"/>
           </a:p>
@@ -1564,7 +1564,7 @@
           <a:p>
             <a:fld id="{FA462F84-2469-44CB-803F-224FFA9B3173}" type="datetimeFigureOut">
               <a:rPr kumimoji="1" lang="ja-JP" altLang="en-US" smtClean="0"/>
-              <a:t>2025/10/30</a:t>
+              <a:t>2026/3/28</a:t>
             </a:fld>
             <a:endParaRPr kumimoji="1" lang="ja-JP" altLang="en-US"/>
           </a:p>
@@ -2040,7 +2040,7 @@
           <a:p>
             <a:fld id="{FA462F84-2469-44CB-803F-224FFA9B3173}" type="datetimeFigureOut">
               <a:rPr kumimoji="1" lang="ja-JP" altLang="en-US" smtClean="0"/>
-              <a:t>2025/10/30</a:t>
+              <a:t>2026/3/28</a:t>
             </a:fld>
             <a:endParaRPr kumimoji="1" lang="ja-JP" altLang="en-US"/>
           </a:p>
@@ -2181,7 +2181,7 @@
           <a:p>
             <a:fld id="{FA462F84-2469-44CB-803F-224FFA9B3173}" type="datetimeFigureOut">
               <a:rPr kumimoji="1" lang="ja-JP" altLang="en-US" smtClean="0"/>
-              <a:t>2025/10/30</a:t>
+              <a:t>2026/3/28</a:t>
             </a:fld>
             <a:endParaRPr kumimoji="1" lang="ja-JP" altLang="en-US"/>
           </a:p>
@@ -2294,7 +2294,7 @@
           <a:p>
             <a:fld id="{FA462F84-2469-44CB-803F-224FFA9B3173}" type="datetimeFigureOut">
               <a:rPr kumimoji="1" lang="ja-JP" altLang="en-US" smtClean="0"/>
-              <a:t>2025/10/30</a:t>
+              <a:t>2026/3/28</a:t>
             </a:fld>
             <a:endParaRPr kumimoji="1" lang="ja-JP" altLang="en-US"/>
           </a:p>
@@ -2637,7 +2637,7 @@
           <a:p>
             <a:fld id="{FA462F84-2469-44CB-803F-224FFA9B3173}" type="datetimeFigureOut">
               <a:rPr kumimoji="1" lang="ja-JP" altLang="en-US" smtClean="0"/>
-              <a:t>2025/10/30</a:t>
+              <a:t>2026/3/28</a:t>
             </a:fld>
             <a:endParaRPr kumimoji="1" lang="ja-JP" altLang="en-US"/>
           </a:p>
@@ -2925,7 +2925,7 @@
           <a:p>
             <a:fld id="{FA462F84-2469-44CB-803F-224FFA9B3173}" type="datetimeFigureOut">
               <a:rPr kumimoji="1" lang="ja-JP" altLang="en-US" smtClean="0"/>
-              <a:t>2025/10/30</a:t>
+              <a:t>2026/3/28</a:t>
             </a:fld>
             <a:endParaRPr kumimoji="1" lang="ja-JP" altLang="en-US"/>
           </a:p>
@@ -3198,7 +3198,7 @@
           <a:p>
             <a:fld id="{FA462F84-2469-44CB-803F-224FFA9B3173}" type="datetimeFigureOut">
               <a:rPr kumimoji="1" lang="ja-JP" altLang="en-US" smtClean="0"/>
-              <a:t>2025/10/30</a:t>
+              <a:t>2026/3/28</a:t>
             </a:fld>
             <a:endParaRPr kumimoji="1" lang="ja-JP" altLang="en-US"/>
           </a:p>
@@ -3864,8 +3864,8 @@
             </p:nvSpPr>
             <p:spPr>
               <a:xfrm>
-                <a:off x="480291" y="1497142"/>
-                <a:ext cx="8249324" cy="1754326"/>
+                <a:off x="480290" y="1497142"/>
+                <a:ext cx="8651117" cy="1754326"/>
               </a:xfrm>
               <a:prstGeom prst="rect">
                 <a:avLst/>
@@ -3962,7 +3962,7 @@
               <a:p>
                 <a:r>
                   <a:rPr lang="ja-JP" altLang="en-US" sz="2000" dirty="0"/>
-                  <a:t>　　　　を始点として（　　　</a:t>
+                  <a:t>　　　　を始点とすると（　　　</a:t>
                 </a:r>
                 <a:r>
                   <a:rPr lang="en-US" altLang="ja-JP" sz="2000" dirty="0"/>
@@ -4002,8 +4002,8 @@
             </p:nvSpPr>
             <p:spPr>
               <a:xfrm>
-                <a:off x="480291" y="1497142"/>
-                <a:ext cx="8249324" cy="1754326"/>
+                <a:off x="480290" y="1497142"/>
+                <a:ext cx="8651117" cy="1754326"/>
               </a:xfrm>
               <a:prstGeom prst="rect">
                 <a:avLst/>
@@ -4011,7 +4011,7 @@
               <a:blipFill>
                 <a:blip r:embed="rId2"/>
                 <a:stretch>
-                  <a:fillRect l="-813" t="-4181" r="-3548" b="-7317"/>
+                  <a:fillRect l="-775" t="-4181" r="-1691" b="-7317"/>
                 </a:stretch>
               </a:blipFill>
             </p:spPr>
@@ -4323,8 +4323,8 @@
           </a:p>
         </p:txBody>
       </p:sp>
-      <mc:AlternateContent xmlns:mc="http://schemas.openxmlformats.org/markup-compatibility/2006">
-        <mc:Choice xmlns:a14="http://schemas.microsoft.com/office/drawing/2010/main" Requires="a14">
+      <mc:AlternateContent xmlns:mc="http://schemas.openxmlformats.org/markup-compatibility/2006" xmlns:a14="http://schemas.microsoft.com/office/drawing/2010/main">
+        <mc:Choice Requires="a14">
           <p:sp>
             <p:nvSpPr>
               <p:cNvPr id="12" name="テキスト ボックス 11">
@@ -4363,7 +4363,7 @@
                       <m:accPr>
                         <m:chr m:val="⃗"/>
                         <m:ctrlPr>
-                          <a:rPr kumimoji="1" lang="ja-JP" altLang="en-US" sz="2000" dirty="0" smtClean="0">
+                          <a:rPr kumimoji="1" lang="ja-JP" altLang="en-US" sz="2000" i="1" dirty="0" smtClean="0">
                             <a:latin typeface="Cambria Math" panose="02040503050406030204" pitchFamily="18" charset="0"/>
                           </a:rPr>
                         </m:ctrlPr>
@@ -4411,7 +4411,7 @@
             </p:txBody>
           </p:sp>
         </mc:Choice>
-        <mc:Fallback>
+        <mc:Fallback xmlns="">
           <p:sp>
             <p:nvSpPr>
               <p:cNvPr id="12" name="テキスト ボックス 11">
@@ -4456,8 +4456,8 @@
           </p:sp>
         </mc:Fallback>
       </mc:AlternateContent>
-      <mc:AlternateContent xmlns:mc="http://schemas.openxmlformats.org/markup-compatibility/2006">
-        <mc:Choice xmlns:a14="http://schemas.microsoft.com/office/drawing/2010/main" Requires="a14">
+      <mc:AlternateContent xmlns:mc="http://schemas.openxmlformats.org/markup-compatibility/2006" xmlns:a14="http://schemas.microsoft.com/office/drawing/2010/main">
+        <mc:Choice Requires="a14">
           <p:sp>
             <p:nvSpPr>
               <p:cNvPr id="35" name="テキスト ボックス 34">
@@ -4486,6 +4486,7 @@
               </a:bodyPr>
               <a:lstStyle/>
               <a:p>
+                <a:pPr/>
                 <a14:m>
                   <m:oMathPara xmlns:m="http://schemas.openxmlformats.org/officeDocument/2006/math">
                     <m:oMathParaPr>
@@ -4518,7 +4519,7 @@
             </p:txBody>
           </p:sp>
         </mc:Choice>
-        <mc:Fallback>
+        <mc:Fallback xmlns="">
           <p:sp>
             <p:nvSpPr>
               <p:cNvPr id="35" name="テキスト ボックス 34">
@@ -4834,8 +4835,8 @@
           </a:p>
         </p:txBody>
       </p:sp>
-      <mc:AlternateContent xmlns:mc="http://schemas.openxmlformats.org/markup-compatibility/2006">
-        <mc:Choice xmlns:a14="http://schemas.microsoft.com/office/drawing/2010/main" Requires="a14">
+      <mc:AlternateContent xmlns:mc="http://schemas.openxmlformats.org/markup-compatibility/2006" xmlns:a14="http://schemas.microsoft.com/office/drawing/2010/main">
+        <mc:Choice Requires="a14">
           <p:sp>
             <p:nvSpPr>
               <p:cNvPr id="44" name="テキスト ボックス 43">
@@ -4864,6 +4865,7 @@
               </a:bodyPr>
               <a:lstStyle/>
               <a:p>
+                <a:pPr/>
                 <a14:m>
                   <m:oMathPara xmlns:m="http://schemas.openxmlformats.org/officeDocument/2006/math">
                     <m:oMathParaPr>
@@ -4896,7 +4898,7 @@
             </p:txBody>
           </p:sp>
         </mc:Choice>
-        <mc:Fallback>
+        <mc:Fallback xmlns="">
           <p:sp>
             <p:nvSpPr>
               <p:cNvPr id="44" name="テキスト ボックス 43">
@@ -4941,8 +4943,8 @@
           </p:sp>
         </mc:Fallback>
       </mc:AlternateContent>
-      <mc:AlternateContent xmlns:mc="http://schemas.openxmlformats.org/markup-compatibility/2006">
-        <mc:Choice xmlns:a14="http://schemas.microsoft.com/office/drawing/2010/main" Requires="a14">
+      <mc:AlternateContent xmlns:mc="http://schemas.openxmlformats.org/markup-compatibility/2006" xmlns:a14="http://schemas.microsoft.com/office/drawing/2010/main">
+        <mc:Choice Requires="a14">
           <p:sp>
             <p:nvSpPr>
               <p:cNvPr id="45" name="テキスト ボックス 44">
@@ -4977,7 +4979,7 @@
                       <m:accPr>
                         <m:chr m:val="⃗"/>
                         <m:ctrlPr>
-                          <a:rPr kumimoji="1" lang="ja-JP" altLang="en-US" sz="2000" dirty="0" smtClean="0">
+                          <a:rPr kumimoji="1" lang="ja-JP" altLang="en-US" sz="2000" i="1" dirty="0" smtClean="0">
                             <a:latin typeface="Cambria Math" panose="02040503050406030204" pitchFamily="18" charset="0"/>
                           </a:rPr>
                         </m:ctrlPr>
@@ -5022,7 +5024,7 @@
             </p:txBody>
           </p:sp>
         </mc:Choice>
-        <mc:Fallback>
+        <mc:Fallback xmlns="">
           <p:sp>
             <p:nvSpPr>
               <p:cNvPr id="45" name="テキスト ボックス 44">
@@ -5501,8 +5503,8 @@
           </a:p>
         </p:txBody>
       </p:sp>
-      <mc:AlternateContent xmlns:mc="http://schemas.openxmlformats.org/markup-compatibility/2006">
-        <mc:Choice xmlns:a14="http://schemas.microsoft.com/office/drawing/2010/main" Requires="a14">
+      <mc:AlternateContent xmlns:mc="http://schemas.openxmlformats.org/markup-compatibility/2006" xmlns:a14="http://schemas.microsoft.com/office/drawing/2010/main">
+        <mc:Choice Requires="a14">
           <p:sp>
             <p:nvSpPr>
               <p:cNvPr id="35" name="テキスト ボックス 34">
@@ -5531,6 +5533,7 @@
               </a:bodyPr>
               <a:lstStyle/>
               <a:p>
+                <a:pPr/>
                 <a14:m>
                   <m:oMathPara xmlns:m="http://schemas.openxmlformats.org/officeDocument/2006/math">
                     <m:oMathParaPr>
@@ -5563,7 +5566,7 @@
             </p:txBody>
           </p:sp>
         </mc:Choice>
-        <mc:Fallback>
+        <mc:Fallback xmlns="">
           <p:sp>
             <p:nvSpPr>
               <p:cNvPr id="35" name="テキスト ボックス 34">
@@ -5879,8 +5882,8 @@
           </a:p>
         </p:txBody>
       </p:sp>
-      <mc:AlternateContent xmlns:mc="http://schemas.openxmlformats.org/markup-compatibility/2006">
-        <mc:Choice xmlns:a14="http://schemas.microsoft.com/office/drawing/2010/main" Requires="a14">
+      <mc:AlternateContent xmlns:mc="http://schemas.openxmlformats.org/markup-compatibility/2006" xmlns:a14="http://schemas.microsoft.com/office/drawing/2010/main">
+        <mc:Choice Requires="a14">
           <p:sp>
             <p:nvSpPr>
               <p:cNvPr id="44" name="テキスト ボックス 43">
@@ -5909,6 +5912,7 @@
               </a:bodyPr>
               <a:lstStyle/>
               <a:p>
+                <a:pPr/>
                 <a14:m>
                   <m:oMathPara xmlns:m="http://schemas.openxmlformats.org/officeDocument/2006/math">
                     <m:oMathParaPr>
@@ -5941,7 +5945,7 @@
             </p:txBody>
           </p:sp>
         </mc:Choice>
-        <mc:Fallback>
+        <mc:Fallback xmlns="">
           <p:sp>
             <p:nvSpPr>
               <p:cNvPr id="44" name="テキスト ボックス 43">
@@ -5986,8 +5990,8 @@
           </p:sp>
         </mc:Fallback>
       </mc:AlternateContent>
-      <mc:AlternateContent xmlns:mc="http://schemas.openxmlformats.org/markup-compatibility/2006">
-        <mc:Choice xmlns:a14="http://schemas.microsoft.com/office/drawing/2010/main" Requires="a14">
+      <mc:AlternateContent xmlns:mc="http://schemas.openxmlformats.org/markup-compatibility/2006" xmlns:a14="http://schemas.microsoft.com/office/drawing/2010/main">
+        <mc:Choice Requires="a14">
           <p:sp>
             <p:nvSpPr>
               <p:cNvPr id="11" name="テキスト ボックス 10">
@@ -6125,7 +6129,7 @@
             </p:txBody>
           </p:sp>
         </mc:Choice>
-        <mc:Fallback>
+        <mc:Fallback xmlns="">
           <p:sp>
             <p:nvSpPr>
               <p:cNvPr id="11" name="テキスト ボックス 10">
@@ -6282,8 +6286,8 @@
           </a:p>
         </p:txBody>
       </p:sp>
-      <mc:AlternateContent xmlns:mc="http://schemas.openxmlformats.org/markup-compatibility/2006">
-        <mc:Choice xmlns:a14="http://schemas.microsoft.com/office/drawing/2010/main" Requires="a14">
+      <mc:AlternateContent xmlns:mc="http://schemas.openxmlformats.org/markup-compatibility/2006" xmlns:a14="http://schemas.microsoft.com/office/drawing/2010/main">
+        <mc:Choice Requires="a14">
           <p:sp>
             <p:nvSpPr>
               <p:cNvPr id="17" name="テキスト ボックス 16">
@@ -6312,6 +6316,7 @@
               </a:bodyPr>
               <a:lstStyle/>
               <a:p>
+                <a:pPr/>
                 <a14:m>
                   <m:oMathPara xmlns:m="http://schemas.openxmlformats.org/officeDocument/2006/math">
                     <m:oMathParaPr>
@@ -6344,7 +6349,7 @@
             </p:txBody>
           </p:sp>
         </mc:Choice>
-        <mc:Fallback>
+        <mc:Fallback xmlns="">
           <p:sp>
             <p:nvSpPr>
               <p:cNvPr id="17" name="テキスト ボックス 16">
